--- a/dataset/guides_final/NET/guide/IT-NET-003_네트워크 장애 신고·이관 가이드.pptx
+++ b/dataset/guides_final/NET/guide/IT-NET-003_네트워크 장애 신고·이관 가이드.pptx
@@ -3235,7 +3235,7 @@
                 <a:ea typeface="Malgun Gothic"/>
                 <a:cs typeface="Malgun Gothic"/>
               </a:rPr>
-              <a:t>한화시스템 ICT 임직원 IT 안내 · VPN·네트워크</a:t>
+              <a:t>가상 ICT 기업 임직원 IT 안내 · VPN·네트워크</a:t>
             </a:r>
           </a:p>
         </p:txBody>
@@ -3467,7 +3467,7 @@
                 <a:ea typeface="Malgun Gothic"/>
                 <a:cs typeface="Malgun Gothic"/>
               </a:rPr>
-              <a:t>© HANWHA SYSTEMS ICT · IT-NET-003 · 사내 일반</a:t>
+              <a:t>© 가상 ICT 기업 · IT-NET-003 · 사내 일반</a:t>
             </a:r>
           </a:p>
         </p:txBody>
@@ -5605,7 +5605,7 @@
                 <a:ea typeface="Malgun Gothic"/>
                 <a:cs typeface="Malgun Gothic"/>
               </a:rPr>
-              <a:t>© HANWHA SYSTEMS ICT · IT-NET-003 · 사내 일반</a:t>
+              <a:t>© 가상 ICT 기업 · IT-NET-003 · 사내 일반</a:t>
             </a:r>
           </a:p>
         </p:txBody>
@@ -7135,7 +7135,7 @@
                 <a:ea typeface="Malgun Gothic"/>
                 <a:cs typeface="Malgun Gothic"/>
               </a:rPr>
-              <a:t>© HANWHA SYSTEMS ICT · IT-NET-003 · 사내 일반</a:t>
+              <a:t>© 가상 ICT 기업 · IT-NET-003 · 사내 일반</a:t>
             </a:r>
           </a:p>
         </p:txBody>
@@ -8879,7 +8879,7 @@
                 <a:ea typeface="Malgun Gothic"/>
                 <a:cs typeface="Malgun Gothic"/>
               </a:rPr>
-              <a:t>© HANWHA SYSTEMS ICT · IT-NET-003 · 사내 일반</a:t>
+              <a:t>© 가상 ICT 기업 · IT-NET-003 · 사내 일반</a:t>
             </a:r>
           </a:p>
         </p:txBody>
@@ -10385,7 +10385,7 @@
                 <a:ea typeface="Malgun Gothic"/>
                 <a:cs typeface="Malgun Gothic"/>
               </a:rPr>
-              <a:t>© HANWHA SYSTEMS ICT · IT-NET-003 · 사내 일반</a:t>
+              <a:t>© 가상 ICT 기업 · IT-NET-003 · 사내 일반</a:t>
             </a:r>
           </a:p>
         </p:txBody>
@@ -10633,7 +10633,7 @@
                 <a:ea typeface="Malgun Gothic"/>
                 <a:cs typeface="Malgun Gothic"/>
               </a:rPr>
-              <a:t>© HANWHA SYSTEMS ICT · IT-NET-003 · 사내 일반</a:t>
+              <a:t>© 가상 ICT 기업 · IT-NET-003 · 사내 일반</a:t>
             </a:r>
           </a:p>
         </p:txBody>
@@ -11214,7 +11214,7 @@
                 <a:ea typeface="Malgun Gothic"/>
                 <a:cs typeface="Malgun Gothic"/>
               </a:rPr>
-              <a:t>© HANWHA SYSTEMS ICT · IT-NET-003 · 사내 일반</a:t>
+              <a:t>© 가상 ICT 기업 · IT-NET-003 · 사내 일반</a:t>
             </a:r>
           </a:p>
         </p:txBody>
@@ -11462,7 +11462,7 @@
                 <a:ea typeface="Malgun Gothic"/>
                 <a:cs typeface="Malgun Gothic"/>
               </a:rPr>
-              <a:t>© HANWHA SYSTEMS ICT · IT-NET-003 · 사내 일반</a:t>
+              <a:t>© 가상 ICT 기업 · IT-NET-003 · 사내 일반</a:t>
             </a:r>
           </a:p>
         </p:txBody>
@@ -12027,7 +12027,7 @@
                 <a:ea typeface="Malgun Gothic"/>
                 <a:cs typeface="Malgun Gothic"/>
               </a:rPr>
-              <a:t>© HANWHA SYSTEMS ICT · IT-NET-003 · 사내 일반</a:t>
+              <a:t>© 가상 ICT 기업 · IT-NET-003 · 사내 일반</a:t>
             </a:r>
           </a:p>
         </p:txBody>
@@ -12275,7 +12275,7 @@
                 <a:ea typeface="Malgun Gothic"/>
                 <a:cs typeface="Malgun Gothic"/>
               </a:rPr>
-              <a:t>© HANWHA SYSTEMS ICT · IT-NET-003 · 사내 일반</a:t>
+              <a:t>© 가상 ICT 기업 · IT-NET-003 · 사내 일반</a:t>
             </a:r>
           </a:p>
         </p:txBody>
@@ -12787,7 +12787,7 @@
                           <a:ea typeface="Malgun Gothic"/>
                           <a:cs typeface="Malgun Gothic"/>
                         </a:rPr>
-                        <a:t>사내 IT 포털(hanwha-admin) 상단 [챗봇 문의]</a:t>
+                        <a:t>사내 IT 포털 상단 [챗봇 문의]</a:t>
                       </a:r>
                     </a:p>
                   </a:txBody>
@@ -13479,7 +13479,7 @@
                           <a:ea typeface="Malgun Gothic"/>
                           <a:cs typeface="Malgun Gothic"/>
                         </a:rPr>
-                        <a:t>it-helpdesk@hanwha-ict.example</a:t>
+                        <a:t>it-helpdesk@ict.example</a:t>
                       </a:r>
                     </a:p>
                   </a:txBody>
@@ -13778,7 +13778,7 @@
                 <a:ea typeface="Malgun Gothic"/>
                 <a:cs typeface="Malgun Gothic"/>
               </a:rPr>
-              <a:t>© HANWHA SYSTEMS ICT · IT-NET-003 · 사내 일반</a:t>
+              <a:t>© 가상 ICT 기업 · IT-NET-003 · 사내 일반</a:t>
             </a:r>
           </a:p>
         </p:txBody>
@@ -15583,7 +15583,7 @@
                 <a:ea typeface="Malgun Gothic"/>
                 <a:cs typeface="Malgun Gothic"/>
               </a:rPr>
-              <a:t>© HANWHA SYSTEMS ICT · IT-NET-003 · 사내 일반</a:t>
+              <a:t>© 가상 ICT 기업 · IT-NET-003 · 사내 일반</a:t>
             </a:r>
           </a:p>
         </p:txBody>
@@ -15831,7 +15831,7 @@
                 <a:ea typeface="Malgun Gothic"/>
                 <a:cs typeface="Malgun Gothic"/>
               </a:rPr>
-              <a:t>© HANWHA SYSTEMS ICT · IT-NET-003 · 사내 일반</a:t>
+              <a:t>© 가상 ICT 기업 · IT-NET-003 · 사내 일반</a:t>
             </a:r>
           </a:p>
         </p:txBody>
@@ -17823,7 +17823,7 @@
                 <a:ea typeface="Malgun Gothic"/>
                 <a:cs typeface="Malgun Gothic"/>
               </a:rPr>
-              <a:t>© HANWHA SYSTEMS ICT · IT-NET-003 · 사내 일반</a:t>
+              <a:t>© 가상 ICT 기업 · IT-NET-003 · 사내 일반</a:t>
             </a:r>
           </a:p>
         </p:txBody>
@@ -18800,7 +18800,7 @@
                 <a:ea typeface="Malgun Gothic"/>
                 <a:cs typeface="Malgun Gothic"/>
               </a:rPr>
-              <a:t>© HANWHA SYSTEMS ICT · IT-NET-003 · 사내 일반</a:t>
+              <a:t>© 가상 ICT 기업 · IT-NET-003 · 사내 일반</a:t>
             </a:r>
           </a:p>
         </p:txBody>
@@ -20076,7 +20076,7 @@
                 <a:ea typeface="Malgun Gothic"/>
                 <a:cs typeface="Malgun Gothic"/>
               </a:rPr>
-              <a:t>© HANWHA SYSTEMS ICT · IT-NET-003 · 사내 일반</a:t>
+              <a:t>© 가상 ICT 기업 · IT-NET-003 · 사내 일반</a:t>
             </a:r>
           </a:p>
         </p:txBody>
@@ -20324,7 +20324,7 @@
                 <a:ea typeface="Malgun Gothic"/>
                 <a:cs typeface="Malgun Gothic"/>
               </a:rPr>
-              <a:t>© HANWHA SYSTEMS ICT · IT-NET-003 · 사내 일반</a:t>
+              <a:t>© 가상 ICT 기업 · IT-NET-003 · 사내 일반</a:t>
             </a:r>
           </a:p>
         </p:txBody>
@@ -21092,7 +21092,7 @@
                 <a:ea typeface="Malgun Gothic"/>
                 <a:cs typeface="Malgun Gothic"/>
               </a:rPr>
-              <a:t>© HANWHA SYSTEMS ICT · IT-NET-003 · 사내 일반</a:t>
+              <a:t>© 가상 ICT 기업 · IT-NET-003 · 사내 일반</a:t>
             </a:r>
           </a:p>
         </p:txBody>
@@ -21340,7 +21340,7 @@
                 <a:ea typeface="Malgun Gothic"/>
                 <a:cs typeface="Malgun Gothic"/>
               </a:rPr>
-              <a:t>© HANWHA SYSTEMS ICT · IT-NET-003 · 사내 일반</a:t>
+              <a:t>© 가상 ICT 기업 · IT-NET-003 · 사내 일반</a:t>
             </a:r>
           </a:p>
         </p:txBody>
@@ -21999,7 +21999,7 @@
                 <a:ea typeface="Malgun Gothic"/>
                 <a:cs typeface="Malgun Gothic"/>
               </a:rPr>
-              <a:t>© HANWHA SYSTEMS ICT · IT-NET-003 · 사내 일반</a:t>
+              <a:t>© 가상 ICT 기업 · IT-NET-003 · 사내 일반</a:t>
             </a:r>
           </a:p>
         </p:txBody>
@@ -22247,7 +22247,7 @@
                 <a:ea typeface="Malgun Gothic"/>
                 <a:cs typeface="Malgun Gothic"/>
               </a:rPr>
-              <a:t>© HANWHA SYSTEMS ICT · IT-NET-003 · 사내 일반</a:t>
+              <a:t>© 가상 ICT 기업 · IT-NET-003 · 사내 일반</a:t>
             </a:r>
           </a:p>
         </p:txBody>
@@ -23390,7 +23390,7 @@
                 <a:ea typeface="Malgun Gothic"/>
                 <a:cs typeface="Malgun Gothic"/>
               </a:rPr>
-              <a:t>© HANWHA SYSTEMS ICT · IT-NET-003 · 사내 일반</a:t>
+              <a:t>© 가상 ICT 기업 · IT-NET-003 · 사내 일반</a:t>
             </a:r>
           </a:p>
         </p:txBody>
